--- a/中越詩歌/人生的福_Phước hạnh của cuộc đời.pptx
+++ b/中越詩歌/人生的福_Phước hạnh của cuộc đời.pptx
@@ -166,7 +166,7 @@
           <a:lstStyle/>
           <a:p>
             <a:r>
-              <a:rPr lang="en-US" altLang="zh-TW" smtClean="0"/>
+              <a:rPr lang="en-US" altLang="zh-TW"/>
               <a:t>Click to edit Master title style</a:t>
             </a:r>
             <a:endParaRPr lang="zh-TW" altLang="en-US"/>
@@ -285,7 +285,7 @@
           </a:lstStyle>
           <a:p>
             <a:r>
-              <a:rPr lang="en-US" altLang="zh-TW" smtClean="0"/>
+              <a:rPr lang="en-US" altLang="zh-TW"/>
               <a:t>Click to edit Master subtitle style</a:t>
             </a:r>
             <a:endParaRPr lang="zh-TW" altLang="en-US"/>
@@ -309,7 +309,7 @@
           <a:p>
             <a:fld id="{4708DAAA-A60A-4649-A77A-7F12CC5C96A6}" type="datetimeFigureOut">
               <a:rPr lang="vi-VN" smtClean="0"/>
-              <a:t>14/10/2022</a:t>
+              <a:t>06/09/2025</a:t>
             </a:fld>
             <a:endParaRPr lang="vi-VN"/>
           </a:p>
@@ -403,7 +403,7 @@
           <a:lstStyle/>
           <a:p>
             <a:r>
-              <a:rPr lang="en-US" altLang="zh-TW" smtClean="0"/>
+              <a:rPr lang="en-US" altLang="zh-TW"/>
               <a:t>Click to edit Master title style</a:t>
             </a:r>
             <a:endParaRPr lang="zh-TW" altLang="en-US"/>
@@ -427,35 +427,35 @@
           <a:p>
             <a:pPr lvl="0"/>
             <a:r>
-              <a:rPr lang="en-US" altLang="zh-TW" smtClean="0"/>
+              <a:rPr lang="en-US" altLang="zh-TW"/>
               <a:t>Edit Master text styles</a:t>
             </a:r>
           </a:p>
           <a:p>
             <a:pPr lvl="1"/>
             <a:r>
-              <a:rPr lang="en-US" altLang="zh-TW" smtClean="0"/>
+              <a:rPr lang="en-US" altLang="zh-TW"/>
               <a:t>Second level</a:t>
             </a:r>
           </a:p>
           <a:p>
             <a:pPr lvl="2"/>
             <a:r>
-              <a:rPr lang="en-US" altLang="zh-TW" smtClean="0"/>
+              <a:rPr lang="en-US" altLang="zh-TW"/>
               <a:t>Third level</a:t>
             </a:r>
           </a:p>
           <a:p>
             <a:pPr lvl="3"/>
             <a:r>
-              <a:rPr lang="en-US" altLang="zh-TW" smtClean="0"/>
+              <a:rPr lang="en-US" altLang="zh-TW"/>
               <a:t>Fourth level</a:t>
             </a:r>
           </a:p>
           <a:p>
             <a:pPr lvl="4"/>
             <a:r>
-              <a:rPr lang="en-US" altLang="zh-TW" smtClean="0"/>
+              <a:rPr lang="en-US" altLang="zh-TW"/>
               <a:t>Fifth level</a:t>
             </a:r>
             <a:endParaRPr lang="zh-TW" altLang="en-US"/>
@@ -479,7 +479,7 @@
           <a:p>
             <a:fld id="{4708DAAA-A60A-4649-A77A-7F12CC5C96A6}" type="datetimeFigureOut">
               <a:rPr lang="vi-VN" smtClean="0"/>
-              <a:t>14/10/2022</a:t>
+              <a:t>06/09/2025</a:t>
             </a:fld>
             <a:endParaRPr lang="vi-VN"/>
           </a:p>
@@ -578,7 +578,7 @@
           <a:lstStyle/>
           <a:p>
             <a:r>
-              <a:rPr lang="en-US" altLang="zh-TW" smtClean="0"/>
+              <a:rPr lang="en-US" altLang="zh-TW"/>
               <a:t>Click to edit Master title style</a:t>
             </a:r>
             <a:endParaRPr lang="zh-TW" altLang="en-US"/>
@@ -607,35 +607,35 @@
           <a:p>
             <a:pPr lvl="0"/>
             <a:r>
-              <a:rPr lang="en-US" altLang="zh-TW" smtClean="0"/>
+              <a:rPr lang="en-US" altLang="zh-TW"/>
               <a:t>Edit Master text styles</a:t>
             </a:r>
           </a:p>
           <a:p>
             <a:pPr lvl="1"/>
             <a:r>
-              <a:rPr lang="en-US" altLang="zh-TW" smtClean="0"/>
+              <a:rPr lang="en-US" altLang="zh-TW"/>
               <a:t>Second level</a:t>
             </a:r>
           </a:p>
           <a:p>
             <a:pPr lvl="2"/>
             <a:r>
-              <a:rPr lang="en-US" altLang="zh-TW" smtClean="0"/>
+              <a:rPr lang="en-US" altLang="zh-TW"/>
               <a:t>Third level</a:t>
             </a:r>
           </a:p>
           <a:p>
             <a:pPr lvl="3"/>
             <a:r>
-              <a:rPr lang="en-US" altLang="zh-TW" smtClean="0"/>
+              <a:rPr lang="en-US" altLang="zh-TW"/>
               <a:t>Fourth level</a:t>
             </a:r>
           </a:p>
           <a:p>
             <a:pPr lvl="4"/>
             <a:r>
-              <a:rPr lang="en-US" altLang="zh-TW" smtClean="0"/>
+              <a:rPr lang="en-US" altLang="zh-TW"/>
               <a:t>Fifth level</a:t>
             </a:r>
             <a:endParaRPr lang="zh-TW" altLang="en-US"/>
@@ -659,7 +659,7 @@
           <a:p>
             <a:fld id="{4708DAAA-A60A-4649-A77A-7F12CC5C96A6}" type="datetimeFigureOut">
               <a:rPr lang="vi-VN" smtClean="0"/>
-              <a:t>14/10/2022</a:t>
+              <a:t>06/09/2025</a:t>
             </a:fld>
             <a:endParaRPr lang="vi-VN"/>
           </a:p>
@@ -753,7 +753,7 @@
           <a:lstStyle/>
           <a:p>
             <a:r>
-              <a:rPr lang="en-US" altLang="zh-TW" smtClean="0"/>
+              <a:rPr lang="en-US" altLang="zh-TW"/>
               <a:t>Click to edit Master title style</a:t>
             </a:r>
             <a:endParaRPr lang="zh-TW" altLang="en-US"/>
@@ -777,35 +777,35 @@
           <a:p>
             <a:pPr lvl="0"/>
             <a:r>
-              <a:rPr lang="en-US" altLang="zh-TW" smtClean="0"/>
+              <a:rPr lang="en-US" altLang="zh-TW"/>
               <a:t>Edit Master text styles</a:t>
             </a:r>
           </a:p>
           <a:p>
             <a:pPr lvl="1"/>
             <a:r>
-              <a:rPr lang="en-US" altLang="zh-TW" smtClean="0"/>
+              <a:rPr lang="en-US" altLang="zh-TW"/>
               <a:t>Second level</a:t>
             </a:r>
           </a:p>
           <a:p>
             <a:pPr lvl="2"/>
             <a:r>
-              <a:rPr lang="en-US" altLang="zh-TW" smtClean="0"/>
+              <a:rPr lang="en-US" altLang="zh-TW"/>
               <a:t>Third level</a:t>
             </a:r>
           </a:p>
           <a:p>
             <a:pPr lvl="3"/>
             <a:r>
-              <a:rPr lang="en-US" altLang="zh-TW" smtClean="0"/>
+              <a:rPr lang="en-US" altLang="zh-TW"/>
               <a:t>Fourth level</a:t>
             </a:r>
           </a:p>
           <a:p>
             <a:pPr lvl="4"/>
             <a:r>
-              <a:rPr lang="en-US" altLang="zh-TW" smtClean="0"/>
+              <a:rPr lang="en-US" altLang="zh-TW"/>
               <a:t>Fifth level</a:t>
             </a:r>
             <a:endParaRPr lang="zh-TW" altLang="en-US"/>
@@ -829,7 +829,7 @@
           <a:p>
             <a:fld id="{4708DAAA-A60A-4649-A77A-7F12CC5C96A6}" type="datetimeFigureOut">
               <a:rPr lang="vi-VN" smtClean="0"/>
-              <a:t>14/10/2022</a:t>
+              <a:t>06/09/2025</a:t>
             </a:fld>
             <a:endParaRPr lang="vi-VN"/>
           </a:p>
@@ -932,7 +932,7 @@
           </a:lstStyle>
           <a:p>
             <a:r>
-              <a:rPr lang="en-US" altLang="zh-TW" smtClean="0"/>
+              <a:rPr lang="en-US" altLang="zh-TW"/>
               <a:t>Click to edit Master title style</a:t>
             </a:r>
             <a:endParaRPr lang="zh-TW" altLang="en-US"/>
@@ -1052,7 +1052,7 @@
           <a:p>
             <a:pPr lvl="0"/>
             <a:r>
-              <a:rPr lang="en-US" altLang="zh-TW" smtClean="0"/>
+              <a:rPr lang="en-US" altLang="zh-TW"/>
               <a:t>Edit Master text styles</a:t>
             </a:r>
           </a:p>
@@ -1075,7 +1075,7 @@
           <a:p>
             <a:fld id="{4708DAAA-A60A-4649-A77A-7F12CC5C96A6}" type="datetimeFigureOut">
               <a:rPr lang="vi-VN" smtClean="0"/>
-              <a:t>14/10/2022</a:t>
+              <a:t>06/09/2025</a:t>
             </a:fld>
             <a:endParaRPr lang="vi-VN"/>
           </a:p>
@@ -1169,7 +1169,7 @@
           <a:lstStyle/>
           <a:p>
             <a:r>
-              <a:rPr lang="en-US" altLang="zh-TW" smtClean="0"/>
+              <a:rPr lang="en-US" altLang="zh-TW"/>
               <a:t>Click to edit Master title style</a:t>
             </a:r>
             <a:endParaRPr lang="zh-TW" altLang="en-US"/>
@@ -1226,35 +1226,35 @@
           <a:p>
             <a:pPr lvl="0"/>
             <a:r>
-              <a:rPr lang="en-US" altLang="zh-TW" smtClean="0"/>
+              <a:rPr lang="en-US" altLang="zh-TW"/>
               <a:t>Edit Master text styles</a:t>
             </a:r>
           </a:p>
           <a:p>
             <a:pPr lvl="1"/>
             <a:r>
-              <a:rPr lang="en-US" altLang="zh-TW" smtClean="0"/>
+              <a:rPr lang="en-US" altLang="zh-TW"/>
               <a:t>Second level</a:t>
             </a:r>
           </a:p>
           <a:p>
             <a:pPr lvl="2"/>
             <a:r>
-              <a:rPr lang="en-US" altLang="zh-TW" smtClean="0"/>
+              <a:rPr lang="en-US" altLang="zh-TW"/>
               <a:t>Third level</a:t>
             </a:r>
           </a:p>
           <a:p>
             <a:pPr lvl="3"/>
             <a:r>
-              <a:rPr lang="en-US" altLang="zh-TW" smtClean="0"/>
+              <a:rPr lang="en-US" altLang="zh-TW"/>
               <a:t>Fourth level</a:t>
             </a:r>
           </a:p>
           <a:p>
             <a:pPr lvl="4"/>
             <a:r>
-              <a:rPr lang="en-US" altLang="zh-TW" smtClean="0"/>
+              <a:rPr lang="en-US" altLang="zh-TW"/>
               <a:t>Fifth level</a:t>
             </a:r>
             <a:endParaRPr lang="zh-TW" altLang="en-US"/>
@@ -1311,35 +1311,35 @@
           <a:p>
             <a:pPr lvl="0"/>
             <a:r>
-              <a:rPr lang="en-US" altLang="zh-TW" smtClean="0"/>
+              <a:rPr lang="en-US" altLang="zh-TW"/>
               <a:t>Edit Master text styles</a:t>
             </a:r>
           </a:p>
           <a:p>
             <a:pPr lvl="1"/>
             <a:r>
-              <a:rPr lang="en-US" altLang="zh-TW" smtClean="0"/>
+              <a:rPr lang="en-US" altLang="zh-TW"/>
               <a:t>Second level</a:t>
             </a:r>
           </a:p>
           <a:p>
             <a:pPr lvl="2"/>
             <a:r>
-              <a:rPr lang="en-US" altLang="zh-TW" smtClean="0"/>
+              <a:rPr lang="en-US" altLang="zh-TW"/>
               <a:t>Third level</a:t>
             </a:r>
           </a:p>
           <a:p>
             <a:pPr lvl="3"/>
             <a:r>
-              <a:rPr lang="en-US" altLang="zh-TW" smtClean="0"/>
+              <a:rPr lang="en-US" altLang="zh-TW"/>
               <a:t>Fourth level</a:t>
             </a:r>
           </a:p>
           <a:p>
             <a:pPr lvl="4"/>
             <a:r>
-              <a:rPr lang="en-US" altLang="zh-TW" smtClean="0"/>
+              <a:rPr lang="en-US" altLang="zh-TW"/>
               <a:t>Fifth level</a:t>
             </a:r>
             <a:endParaRPr lang="zh-TW" altLang="en-US"/>
@@ -1363,7 +1363,7 @@
           <a:p>
             <a:fld id="{4708DAAA-A60A-4649-A77A-7F12CC5C96A6}" type="datetimeFigureOut">
               <a:rPr lang="vi-VN" smtClean="0"/>
-              <a:t>14/10/2022</a:t>
+              <a:t>06/09/2025</a:t>
             </a:fld>
             <a:endParaRPr lang="vi-VN"/>
           </a:p>
@@ -1461,7 +1461,7 @@
           </a:lstStyle>
           <a:p>
             <a:r>
-              <a:rPr lang="en-US" altLang="zh-TW" smtClean="0"/>
+              <a:rPr lang="en-US" altLang="zh-TW"/>
               <a:t>Click to edit Master title style</a:t>
             </a:r>
             <a:endParaRPr lang="zh-TW" altLang="en-US"/>
@@ -1527,7 +1527,7 @@
           <a:p>
             <a:pPr lvl="0"/>
             <a:r>
-              <a:rPr lang="en-US" altLang="zh-TW" smtClean="0"/>
+              <a:rPr lang="en-US" altLang="zh-TW"/>
               <a:t>Edit Master text styles</a:t>
             </a:r>
           </a:p>
@@ -1583,35 +1583,35 @@
           <a:p>
             <a:pPr lvl="0"/>
             <a:r>
-              <a:rPr lang="en-US" altLang="zh-TW" smtClean="0"/>
+              <a:rPr lang="en-US" altLang="zh-TW"/>
               <a:t>Edit Master text styles</a:t>
             </a:r>
           </a:p>
           <a:p>
             <a:pPr lvl="1"/>
             <a:r>
-              <a:rPr lang="en-US" altLang="zh-TW" smtClean="0"/>
+              <a:rPr lang="en-US" altLang="zh-TW"/>
               <a:t>Second level</a:t>
             </a:r>
           </a:p>
           <a:p>
             <a:pPr lvl="2"/>
             <a:r>
-              <a:rPr lang="en-US" altLang="zh-TW" smtClean="0"/>
+              <a:rPr lang="en-US" altLang="zh-TW"/>
               <a:t>Third level</a:t>
             </a:r>
           </a:p>
           <a:p>
             <a:pPr lvl="3"/>
             <a:r>
-              <a:rPr lang="en-US" altLang="zh-TW" smtClean="0"/>
+              <a:rPr lang="en-US" altLang="zh-TW"/>
               <a:t>Fourth level</a:t>
             </a:r>
           </a:p>
           <a:p>
             <a:pPr lvl="4"/>
             <a:r>
-              <a:rPr lang="en-US" altLang="zh-TW" smtClean="0"/>
+              <a:rPr lang="en-US" altLang="zh-TW"/>
               <a:t>Fifth level</a:t>
             </a:r>
             <a:endParaRPr lang="zh-TW" altLang="en-US"/>
@@ -1677,7 +1677,7 @@
           <a:p>
             <a:pPr lvl="0"/>
             <a:r>
-              <a:rPr lang="en-US" altLang="zh-TW" smtClean="0"/>
+              <a:rPr lang="en-US" altLang="zh-TW"/>
               <a:t>Edit Master text styles</a:t>
             </a:r>
           </a:p>
@@ -1733,35 +1733,35 @@
           <a:p>
             <a:pPr lvl="0"/>
             <a:r>
-              <a:rPr lang="en-US" altLang="zh-TW" smtClean="0"/>
+              <a:rPr lang="en-US" altLang="zh-TW"/>
               <a:t>Edit Master text styles</a:t>
             </a:r>
           </a:p>
           <a:p>
             <a:pPr lvl="1"/>
             <a:r>
-              <a:rPr lang="en-US" altLang="zh-TW" smtClean="0"/>
+              <a:rPr lang="en-US" altLang="zh-TW"/>
               <a:t>Second level</a:t>
             </a:r>
           </a:p>
           <a:p>
             <a:pPr lvl="2"/>
             <a:r>
-              <a:rPr lang="en-US" altLang="zh-TW" smtClean="0"/>
+              <a:rPr lang="en-US" altLang="zh-TW"/>
               <a:t>Third level</a:t>
             </a:r>
           </a:p>
           <a:p>
             <a:pPr lvl="3"/>
             <a:r>
-              <a:rPr lang="en-US" altLang="zh-TW" smtClean="0"/>
+              <a:rPr lang="en-US" altLang="zh-TW"/>
               <a:t>Fourth level</a:t>
             </a:r>
           </a:p>
           <a:p>
             <a:pPr lvl="4"/>
             <a:r>
-              <a:rPr lang="en-US" altLang="zh-TW" smtClean="0"/>
+              <a:rPr lang="en-US" altLang="zh-TW"/>
               <a:t>Fifth level</a:t>
             </a:r>
             <a:endParaRPr lang="zh-TW" altLang="en-US"/>
@@ -1785,7 +1785,7 @@
           <a:p>
             <a:fld id="{4708DAAA-A60A-4649-A77A-7F12CC5C96A6}" type="datetimeFigureOut">
               <a:rPr lang="vi-VN" smtClean="0"/>
-              <a:t>14/10/2022</a:t>
+              <a:t>06/09/2025</a:t>
             </a:fld>
             <a:endParaRPr lang="vi-VN"/>
           </a:p>
@@ -1879,7 +1879,7 @@
           <a:lstStyle/>
           <a:p>
             <a:r>
-              <a:rPr lang="en-US" altLang="zh-TW" smtClean="0"/>
+              <a:rPr lang="en-US" altLang="zh-TW"/>
               <a:t>Click to edit Master title style</a:t>
             </a:r>
             <a:endParaRPr lang="zh-TW" altLang="en-US"/>
@@ -1903,7 +1903,7 @@
           <a:p>
             <a:fld id="{4708DAAA-A60A-4649-A77A-7F12CC5C96A6}" type="datetimeFigureOut">
               <a:rPr lang="vi-VN" smtClean="0"/>
-              <a:t>14/10/2022</a:t>
+              <a:t>06/09/2025</a:t>
             </a:fld>
             <a:endParaRPr lang="vi-VN"/>
           </a:p>
@@ -1998,7 +1998,7 @@
           <a:p>
             <a:fld id="{4708DAAA-A60A-4649-A77A-7F12CC5C96A6}" type="datetimeFigureOut">
               <a:rPr lang="vi-VN" smtClean="0"/>
-              <a:t>14/10/2022</a:t>
+              <a:t>06/09/2025</a:t>
             </a:fld>
             <a:endParaRPr lang="vi-VN"/>
           </a:p>
@@ -2101,7 +2101,7 @@
           </a:lstStyle>
           <a:p>
             <a:r>
-              <a:rPr lang="en-US" altLang="zh-TW" smtClean="0"/>
+              <a:rPr lang="en-US" altLang="zh-TW"/>
               <a:t>Click to edit Master title style</a:t>
             </a:r>
             <a:endParaRPr lang="zh-TW" altLang="en-US"/>
@@ -2158,35 +2158,35 @@
           <a:p>
             <a:pPr lvl="0"/>
             <a:r>
-              <a:rPr lang="en-US" altLang="zh-TW" smtClean="0"/>
+              <a:rPr lang="en-US" altLang="zh-TW"/>
               <a:t>Edit Master text styles</a:t>
             </a:r>
           </a:p>
           <a:p>
             <a:pPr lvl="1"/>
             <a:r>
-              <a:rPr lang="en-US" altLang="zh-TW" smtClean="0"/>
+              <a:rPr lang="en-US" altLang="zh-TW"/>
               <a:t>Second level</a:t>
             </a:r>
           </a:p>
           <a:p>
             <a:pPr lvl="2"/>
             <a:r>
-              <a:rPr lang="en-US" altLang="zh-TW" smtClean="0"/>
+              <a:rPr lang="en-US" altLang="zh-TW"/>
               <a:t>Third level</a:t>
             </a:r>
           </a:p>
           <a:p>
             <a:pPr lvl="3"/>
             <a:r>
-              <a:rPr lang="en-US" altLang="zh-TW" smtClean="0"/>
+              <a:rPr lang="en-US" altLang="zh-TW"/>
               <a:t>Fourth level</a:t>
             </a:r>
           </a:p>
           <a:p>
             <a:pPr lvl="4"/>
             <a:r>
-              <a:rPr lang="en-US" altLang="zh-TW" smtClean="0"/>
+              <a:rPr lang="en-US" altLang="zh-TW"/>
               <a:t>Fifth level</a:t>
             </a:r>
             <a:endParaRPr lang="zh-TW" altLang="en-US"/>
@@ -2252,7 +2252,7 @@
           <a:p>
             <a:pPr lvl="0"/>
             <a:r>
-              <a:rPr lang="en-US" altLang="zh-TW" smtClean="0"/>
+              <a:rPr lang="en-US" altLang="zh-TW"/>
               <a:t>Edit Master text styles</a:t>
             </a:r>
           </a:p>
@@ -2275,7 +2275,7 @@
           <a:p>
             <a:fld id="{4708DAAA-A60A-4649-A77A-7F12CC5C96A6}" type="datetimeFigureOut">
               <a:rPr lang="vi-VN" smtClean="0"/>
-              <a:t>14/10/2022</a:t>
+              <a:t>06/09/2025</a:t>
             </a:fld>
             <a:endParaRPr lang="vi-VN"/>
           </a:p>
@@ -2378,7 +2378,7 @@
           </a:lstStyle>
           <a:p>
             <a:r>
-              <a:rPr lang="en-US" altLang="zh-TW" smtClean="0"/>
+              <a:rPr lang="en-US" altLang="zh-TW"/>
               <a:t>Click to edit Master title style</a:t>
             </a:r>
             <a:endParaRPr lang="zh-TW" altLang="en-US"/>
@@ -2443,7 +2443,7 @@
           </a:lstStyle>
           <a:p>
             <a:r>
-              <a:rPr lang="en-US" altLang="zh-TW" smtClean="0"/>
+              <a:rPr lang="en-US" altLang="zh-TW"/>
               <a:t>Click icon to add picture</a:t>
             </a:r>
             <a:endParaRPr lang="zh-TW" altLang="en-US"/>
@@ -2509,7 +2509,7 @@
           <a:p>
             <a:pPr lvl="0"/>
             <a:r>
-              <a:rPr lang="en-US" altLang="zh-TW" smtClean="0"/>
+              <a:rPr lang="en-US" altLang="zh-TW"/>
               <a:t>Edit Master text styles</a:t>
             </a:r>
           </a:p>
@@ -2532,7 +2532,7 @@
           <a:p>
             <a:fld id="{4708DAAA-A60A-4649-A77A-7F12CC5C96A6}" type="datetimeFigureOut">
               <a:rPr lang="vi-VN" smtClean="0"/>
-              <a:t>14/10/2022</a:t>
+              <a:t>06/09/2025</a:t>
             </a:fld>
             <a:endParaRPr lang="vi-VN"/>
           </a:p>
@@ -2646,10 +2646,9 @@
           <a:lstStyle/>
           <a:p>
             <a:r>
-              <a:rPr lang="zh-TW" altLang="en-US" smtClean="0"/>
+              <a:rPr lang="zh-TW" altLang="en-US"/>
               <a:t>按一下以編輯母片標題樣式</a:t>
             </a:r>
-            <a:endParaRPr lang="zh-TW" altLang="en-US"/>
           </a:p>
         </p:txBody>
       </p:sp>
@@ -2680,38 +2679,37 @@
           <a:p>
             <a:pPr lvl="0"/>
             <a:r>
-              <a:rPr lang="zh-TW" altLang="en-US" smtClean="0"/>
+              <a:rPr lang="zh-TW" altLang="en-US"/>
               <a:t>按一下以編輯母片文字樣式</a:t>
             </a:r>
           </a:p>
           <a:p>
             <a:pPr lvl="1"/>
             <a:r>
-              <a:rPr lang="zh-TW" altLang="en-US" smtClean="0"/>
+              <a:rPr lang="zh-TW" altLang="en-US"/>
               <a:t>第二層</a:t>
             </a:r>
           </a:p>
           <a:p>
             <a:pPr lvl="2"/>
             <a:r>
-              <a:rPr lang="zh-TW" altLang="en-US" smtClean="0"/>
+              <a:rPr lang="zh-TW" altLang="en-US"/>
               <a:t>第三層</a:t>
             </a:r>
           </a:p>
           <a:p>
             <a:pPr lvl="3"/>
             <a:r>
-              <a:rPr lang="zh-TW" altLang="en-US" smtClean="0"/>
+              <a:rPr lang="zh-TW" altLang="en-US"/>
               <a:t>第四層</a:t>
             </a:r>
           </a:p>
           <a:p>
             <a:pPr lvl="4"/>
             <a:r>
-              <a:rPr lang="zh-TW" altLang="en-US" smtClean="0"/>
+              <a:rPr lang="zh-TW" altLang="en-US"/>
               <a:t>第五層</a:t>
             </a:r>
-            <a:endParaRPr lang="zh-TW" altLang="en-US"/>
           </a:p>
         </p:txBody>
       </p:sp>
@@ -2750,7 +2748,7 @@
           <a:p>
             <a:fld id="{4708DAAA-A60A-4649-A77A-7F12CC5C96A6}" type="datetimeFigureOut">
               <a:rPr lang="vi-VN" smtClean="0"/>
-              <a:t>14/10/2022</a:t>
+              <a:t>06/09/2025</a:t>
             </a:fld>
             <a:endParaRPr lang="vi-VN"/>
           </a:p>
@@ -3164,7 +3162,7 @@
           </a:lstStyle>
           <a:p>
             <a:r>
-              <a:rPr lang="zh-CN" altLang="en-US" sz="7200" b="1" i="1" dirty="0" smtClean="0">
+              <a:rPr lang="zh-CN" altLang="en-US" sz="7200" b="1" i="1" dirty="0">
                 <a:solidFill>
                   <a:srgbClr val="000066"/>
                 </a:solidFill>
@@ -3178,24 +3176,7 @@
                 <a:latin typeface="微軟正黑體" pitchFamily="34" charset="-120"/>
                 <a:ea typeface="微軟正黑體" pitchFamily="34" charset="-120"/>
               </a:rPr>
-              <a:t>人</a:t>
-            </a:r>
-            <a:r>
-              <a:rPr lang="zh-CN" altLang="en-US" sz="7200" b="1" i="1" dirty="0">
-                <a:solidFill>
-                  <a:srgbClr val="000066"/>
-                </a:solidFill>
-                <a:effectLst>
-                  <a:outerShdw blurRad="38100" dist="38100" dir="2700000" algn="tl">
-                    <a:srgbClr val="000000">
-                      <a:alpha val="43137"/>
-                    </a:srgbClr>
-                  </a:outerShdw>
-                </a:effectLst>
-                <a:latin typeface="微軟正黑體" pitchFamily="34" charset="-120"/>
-                <a:ea typeface="微軟正黑體" pitchFamily="34" charset="-120"/>
-              </a:rPr>
-              <a:t>生的福</a:t>
+              <a:t>人生的福</a:t>
             </a:r>
             <a:endParaRPr lang="zh-TW" altLang="en-US" sz="7200" b="1" i="1" dirty="0">
               <a:solidFill>
@@ -3253,7 +3234,7 @@
           </a:lstStyle>
           <a:p>
             <a:r>
-              <a:rPr lang="en-US" sz="4800" b="1" i="1" dirty="0" err="1" smtClean="0">
+              <a:rPr lang="en-US" sz="4800" b="1" i="1" dirty="0" err="1">
                 <a:solidFill>
                   <a:srgbClr val="660033"/>
                 </a:solidFill>
@@ -3271,7 +3252,7 @@
               <a:t>Phước</a:t>
             </a:r>
             <a:r>
-              <a:rPr lang="en-US" sz="4800" b="1" i="1" dirty="0" smtClean="0">
+              <a:rPr lang="en-US" sz="4800" b="1" i="1" dirty="0">
                 <a:solidFill>
                   <a:srgbClr val="660033"/>
                 </a:solidFill>
@@ -3880,7 +3861,7 @@
               <a:t>( </a:t>
             </a:r>
             <a:r>
-              <a:rPr lang="zh-CN" altLang="en-US" sz="4267" b="1" dirty="0" smtClean="0">
+              <a:rPr lang="zh-CN" altLang="en-US" sz="4267" b="1" dirty="0">
                 <a:solidFill>
                   <a:srgbClr val="000066"/>
                 </a:solidFill>
@@ -3891,7 +3872,17 @@
               <a:t>副</a:t>
             </a:r>
             <a:r>
-              <a:rPr lang="en-US" sz="4267" b="1" dirty="0" smtClean="0">
+              <a:rPr lang="zh-CN" altLang="en-US" sz="4267" b="1" dirty="0">
+                <a:solidFill>
+                  <a:srgbClr val="000066"/>
+                </a:solidFill>
+                <a:latin typeface="Microsoft JhengHei" panose="020B0604030504040204" pitchFamily="34" charset="-120"/>
+                <a:ea typeface="Microsoft JhengHei" panose="020B0604030504040204" pitchFamily="34" charset="-120"/>
+              </a:rPr>
+              <a:t>歌</a:t>
+            </a:r>
+            <a:r>
+              <a:rPr lang="en-US" sz="4267" b="1" dirty="0">
                 <a:solidFill>
                   <a:srgbClr val="000066"/>
                 </a:solidFill>
@@ -3899,18 +3890,7 @@
                 <a:latin typeface="Microsoft JhengHei" panose="020B0604030504040204" pitchFamily="34" charset="-120"/>
                 <a:ea typeface="Microsoft JhengHei" panose="020B0604030504040204" pitchFamily="34" charset="-120"/>
               </a:rPr>
-              <a:t> </a:t>
-            </a:r>
-            <a:r>
-              <a:rPr lang="en-US" sz="4267" b="1" dirty="0">
-                <a:solidFill>
-                  <a:srgbClr val="000066"/>
-                </a:solidFill>
-                <a:effectLst/>
-                <a:latin typeface="Microsoft JhengHei" panose="020B0604030504040204" pitchFamily="34" charset="-120"/>
-                <a:ea typeface="Microsoft JhengHei" panose="020B0604030504040204" pitchFamily="34" charset="-120"/>
-              </a:rPr>
-              <a:t>)</a:t>
+              <a:t> )</a:t>
             </a:r>
             <a:endParaRPr lang="vi-VN" sz="4267" b="1" dirty="0">
               <a:solidFill>
@@ -4300,50 +4280,35 @@
                 <a:solidFill>
                   <a:srgbClr val="000066"/>
                 </a:solidFill>
-                <a:effectLst/>
                 <a:latin typeface="Microsoft JhengHei" panose="020B0604030504040204" pitchFamily="34" charset="-120"/>
                 <a:ea typeface="Microsoft JhengHei" panose="020B0604030504040204" pitchFamily="34" charset="-120"/>
               </a:rPr>
               <a:t>( </a:t>
             </a:r>
             <a:r>
-              <a:rPr lang="zh-CN" altLang="en-US" sz="4267" b="1" dirty="0" smtClean="0">
+              <a:rPr lang="zh-CN" altLang="en-US" sz="4267" b="1" dirty="0">
                 <a:solidFill>
                   <a:srgbClr val="000066"/>
                 </a:solidFill>
-                <a:effectLst/>
                 <a:latin typeface="Microsoft JhengHei" panose="020B0604030504040204" pitchFamily="34" charset="-120"/>
                 <a:ea typeface="Microsoft JhengHei" panose="020B0604030504040204" pitchFamily="34" charset="-120"/>
               </a:rPr>
-              <a:t>副</a:t>
-            </a:r>
-            <a:r>
-              <a:rPr lang="en-US" sz="4267" b="1" dirty="0" smtClean="0">
+              <a:t>副歌</a:t>
+            </a:r>
+            <a:r>
+              <a:rPr lang="en-US" sz="4267" b="1" dirty="0">
                 <a:solidFill>
                   <a:srgbClr val="000066"/>
                 </a:solidFill>
-                <a:effectLst/>
                 <a:latin typeface="Microsoft JhengHei" panose="020B0604030504040204" pitchFamily="34" charset="-120"/>
                 <a:ea typeface="Microsoft JhengHei" panose="020B0604030504040204" pitchFamily="34" charset="-120"/>
               </a:rPr>
-              <a:t> </a:t>
-            </a:r>
-            <a:r>
-              <a:rPr lang="en-US" sz="4267" b="1" dirty="0">
-                <a:solidFill>
-                  <a:srgbClr val="000066"/>
-                </a:solidFill>
-                <a:effectLst/>
-                <a:latin typeface="Microsoft JhengHei" panose="020B0604030504040204" pitchFamily="34" charset="-120"/>
-                <a:ea typeface="Microsoft JhengHei" panose="020B0604030504040204" pitchFamily="34" charset="-120"/>
-              </a:rPr>
-              <a:t>)</a:t>
+              <a:t> )</a:t>
             </a:r>
             <a:endParaRPr lang="vi-VN" sz="4267" b="1" dirty="0">
               <a:solidFill>
                 <a:srgbClr val="000066"/>
               </a:solidFill>
-              <a:effectLst/>
               <a:ea typeface="Microsoft JhengHei" panose="020B0604030504040204" pitchFamily="34" charset="-120"/>
             </a:endParaRPr>
           </a:p>
@@ -4412,30 +4377,20 @@
                 <a:latin typeface="微軟正黑體" pitchFamily="34" charset="-120"/>
                 <a:ea typeface="微軟正黑體" pitchFamily="34" charset="-120"/>
               </a:rPr>
-              <a:t>勝</a:t>
-            </a:r>
-            <a:r>
-              <a:rPr lang="zh-TW" altLang="en-US" sz="6400" b="1" dirty="0" smtClean="0">
+              <a:t>勝過</a:t>
+            </a:r>
+            <a:r>
+              <a:rPr lang="zh-CN" altLang="en-US" sz="6400" b="1">
                 <a:solidFill>
                   <a:srgbClr val="000066"/>
                 </a:solidFill>
                 <a:latin typeface="微軟正黑體" pitchFamily="34" charset="-120"/>
                 <a:ea typeface="微軟正黑體" pitchFamily="34" charset="-120"/>
               </a:rPr>
-              <a:t>過</a:t>
-            </a:r>
-            <a:r>
-              <a:rPr lang="zh-CN" altLang="en-US" sz="6400" b="1" smtClean="0">
-                <a:solidFill>
-                  <a:srgbClr val="000066"/>
-                </a:solidFill>
-                <a:latin typeface="微軟正黑體" pitchFamily="34" charset="-120"/>
-                <a:ea typeface="微軟正黑體" pitchFamily="34" charset="-120"/>
-              </a:rPr>
               <a:t>你</a:t>
             </a:r>
             <a:r>
-              <a:rPr lang="zh-TW" altLang="en-US" sz="6400" b="1" smtClean="0">
+              <a:rPr lang="zh-TW" altLang="en-US" sz="6400" b="1">
                 <a:solidFill>
                   <a:srgbClr val="000066"/>
                 </a:solidFill>
@@ -4830,50 +4785,35 @@
                 <a:solidFill>
                   <a:srgbClr val="000066"/>
                 </a:solidFill>
-                <a:effectLst/>
                 <a:latin typeface="Microsoft JhengHei" panose="020B0604030504040204" pitchFamily="34" charset="-120"/>
                 <a:ea typeface="Microsoft JhengHei" panose="020B0604030504040204" pitchFamily="34" charset="-120"/>
               </a:rPr>
               <a:t>( </a:t>
             </a:r>
             <a:r>
-              <a:rPr lang="zh-CN" altLang="en-US" sz="4267" b="1" dirty="0" smtClean="0">
+              <a:rPr lang="zh-CN" altLang="en-US" sz="4267" b="1" dirty="0">
                 <a:solidFill>
                   <a:srgbClr val="000066"/>
                 </a:solidFill>
-                <a:effectLst/>
                 <a:latin typeface="Microsoft JhengHei" panose="020B0604030504040204" pitchFamily="34" charset="-120"/>
                 <a:ea typeface="Microsoft JhengHei" panose="020B0604030504040204" pitchFamily="34" charset="-120"/>
               </a:rPr>
-              <a:t>副</a:t>
-            </a:r>
-            <a:r>
-              <a:rPr lang="en-US" sz="4267" b="1" dirty="0" smtClean="0">
+              <a:t>副歌</a:t>
+            </a:r>
+            <a:r>
+              <a:rPr lang="en-US" sz="4267" b="1" dirty="0">
                 <a:solidFill>
                   <a:srgbClr val="000066"/>
                 </a:solidFill>
-                <a:effectLst/>
                 <a:latin typeface="Microsoft JhengHei" panose="020B0604030504040204" pitchFamily="34" charset="-120"/>
                 <a:ea typeface="Microsoft JhengHei" panose="020B0604030504040204" pitchFamily="34" charset="-120"/>
               </a:rPr>
-              <a:t> </a:t>
-            </a:r>
-            <a:r>
-              <a:rPr lang="en-US" sz="4267" b="1" dirty="0">
-                <a:solidFill>
-                  <a:srgbClr val="000066"/>
-                </a:solidFill>
-                <a:effectLst/>
-                <a:latin typeface="Microsoft JhengHei" panose="020B0604030504040204" pitchFamily="34" charset="-120"/>
-                <a:ea typeface="Microsoft JhengHei" panose="020B0604030504040204" pitchFamily="34" charset="-120"/>
-              </a:rPr>
-              <a:t>)</a:t>
+              <a:t> )</a:t>
             </a:r>
             <a:endParaRPr lang="vi-VN" sz="4267" b="1" dirty="0">
               <a:solidFill>
                 <a:srgbClr val="000066"/>
               </a:solidFill>
-              <a:effectLst/>
               <a:ea typeface="Microsoft JhengHei" panose="020B0604030504040204" pitchFamily="34" charset="-120"/>
             </a:endParaRPr>
           </a:p>
@@ -5169,29 +5109,29 @@
                 <a:ea typeface="微軟正黑體" pitchFamily="34" charset="-120"/>
                 <a:cs typeface="Calibri" panose="020F0502020204030204" pitchFamily="34" charset="0"/>
               </a:rPr>
+              <a:t>ước</a:t>
+            </a:r>
+            <a:r>
+              <a:rPr lang="en-US" sz="4000" b="1" dirty="0">
+                <a:solidFill>
+                  <a:srgbClr val="660033"/>
+                </a:solidFill>
+                <a:latin typeface="Calibri" panose="020F0502020204030204" pitchFamily="34" charset="0"/>
+                <a:ea typeface="微軟正黑體" pitchFamily="34" charset="-120"/>
+                <a:cs typeface="Calibri" panose="020F0502020204030204" pitchFamily="34" charset="0"/>
+              </a:rPr>
+              <a:t> </a:t>
+            </a:r>
+            <a:r>
+              <a:rPr lang="en-US" sz="4000" b="1" dirty="0" err="1">
+                <a:solidFill>
+                  <a:srgbClr val="660033"/>
+                </a:solidFill>
+                <a:latin typeface="Calibri" panose="020F0502020204030204" pitchFamily="34" charset="0"/>
+                <a:ea typeface="微軟正黑體" pitchFamily="34" charset="-120"/>
+                <a:cs typeface="Calibri" panose="020F0502020204030204" pitchFamily="34" charset="0"/>
+              </a:rPr>
               <a:t>ao</a:t>
-            </a:r>
-            <a:r>
-              <a:rPr lang="en-US" sz="4000" b="1" dirty="0">
-                <a:solidFill>
-                  <a:srgbClr val="660033"/>
-                </a:solidFill>
-                <a:latin typeface="Calibri" panose="020F0502020204030204" pitchFamily="34" charset="0"/>
-                <a:ea typeface="微軟正黑體" pitchFamily="34" charset="-120"/>
-                <a:cs typeface="Calibri" panose="020F0502020204030204" pitchFamily="34" charset="0"/>
-              </a:rPr>
-              <a:t> </a:t>
-            </a:r>
-            <a:r>
-              <a:rPr lang="en-US" sz="4000" b="1" dirty="0" err="1">
-                <a:solidFill>
-                  <a:srgbClr val="660033"/>
-                </a:solidFill>
-                <a:latin typeface="Calibri" panose="020F0502020204030204" pitchFamily="34" charset="0"/>
-                <a:ea typeface="微軟正黑體" pitchFamily="34" charset="-120"/>
-                <a:cs typeface="Calibri" panose="020F0502020204030204" pitchFamily="34" charset="0"/>
-              </a:rPr>
-              <a:t>ước</a:t>
             </a:r>
             <a:r>
               <a:rPr lang="en-US" sz="4000" b="1" dirty="0">
@@ -5298,50 +5238,35 @@
                 <a:solidFill>
                   <a:srgbClr val="000066"/>
                 </a:solidFill>
-                <a:effectLst/>
                 <a:latin typeface="Microsoft JhengHei" panose="020B0604030504040204" pitchFamily="34" charset="-120"/>
                 <a:ea typeface="Microsoft JhengHei" panose="020B0604030504040204" pitchFamily="34" charset="-120"/>
               </a:rPr>
               <a:t>( </a:t>
             </a:r>
             <a:r>
-              <a:rPr lang="zh-CN" altLang="en-US" sz="4267" b="1" dirty="0" smtClean="0">
+              <a:rPr lang="zh-CN" altLang="en-US" sz="4267" b="1" dirty="0">
                 <a:solidFill>
                   <a:srgbClr val="000066"/>
                 </a:solidFill>
-                <a:effectLst/>
                 <a:latin typeface="Microsoft JhengHei" panose="020B0604030504040204" pitchFamily="34" charset="-120"/>
                 <a:ea typeface="Microsoft JhengHei" panose="020B0604030504040204" pitchFamily="34" charset="-120"/>
               </a:rPr>
-              <a:t>副</a:t>
-            </a:r>
-            <a:r>
-              <a:rPr lang="en-US" sz="4267" b="1" dirty="0" smtClean="0">
+              <a:t>副歌</a:t>
+            </a:r>
+            <a:r>
+              <a:rPr lang="en-US" sz="4267" b="1" dirty="0">
                 <a:solidFill>
                   <a:srgbClr val="000066"/>
                 </a:solidFill>
-                <a:effectLst/>
                 <a:latin typeface="Microsoft JhengHei" panose="020B0604030504040204" pitchFamily="34" charset="-120"/>
                 <a:ea typeface="Microsoft JhengHei" panose="020B0604030504040204" pitchFamily="34" charset="-120"/>
               </a:rPr>
-              <a:t> </a:t>
-            </a:r>
-            <a:r>
-              <a:rPr lang="en-US" sz="4267" b="1" dirty="0">
-                <a:solidFill>
-                  <a:srgbClr val="000066"/>
-                </a:solidFill>
-                <a:effectLst/>
-                <a:latin typeface="Microsoft JhengHei" panose="020B0604030504040204" pitchFamily="34" charset="-120"/>
-                <a:ea typeface="Microsoft JhengHei" panose="020B0604030504040204" pitchFamily="34" charset="-120"/>
-              </a:rPr>
-              <a:t>)</a:t>
+              <a:t> )</a:t>
             </a:r>
             <a:endParaRPr lang="vi-VN" sz="4267" b="1" dirty="0">
               <a:solidFill>
                 <a:srgbClr val="000066"/>
               </a:solidFill>
-              <a:effectLst/>
               <a:ea typeface="Microsoft JhengHei" panose="020B0604030504040204" pitchFamily="34" charset="-120"/>
             </a:endParaRPr>
           </a:p>
@@ -5810,50 +5735,35 @@
                 <a:solidFill>
                   <a:srgbClr val="000066"/>
                 </a:solidFill>
-                <a:effectLst/>
                 <a:latin typeface="Microsoft JhengHei" panose="020B0604030504040204" pitchFamily="34" charset="-120"/>
                 <a:ea typeface="Microsoft JhengHei" panose="020B0604030504040204" pitchFamily="34" charset="-120"/>
               </a:rPr>
               <a:t>( </a:t>
             </a:r>
             <a:r>
-              <a:rPr lang="zh-CN" altLang="en-US" sz="4267" b="1" dirty="0" smtClean="0">
+              <a:rPr lang="zh-CN" altLang="en-US" sz="4267" b="1" dirty="0">
                 <a:solidFill>
                   <a:srgbClr val="000066"/>
                 </a:solidFill>
-                <a:effectLst/>
                 <a:latin typeface="Microsoft JhengHei" panose="020B0604030504040204" pitchFamily="34" charset="-120"/>
                 <a:ea typeface="Microsoft JhengHei" panose="020B0604030504040204" pitchFamily="34" charset="-120"/>
               </a:rPr>
-              <a:t>副</a:t>
-            </a:r>
-            <a:r>
-              <a:rPr lang="en-US" sz="4267" b="1" dirty="0" smtClean="0">
+              <a:t>副歌</a:t>
+            </a:r>
+            <a:r>
+              <a:rPr lang="en-US" sz="4267" b="1" dirty="0">
                 <a:solidFill>
                   <a:srgbClr val="000066"/>
                 </a:solidFill>
-                <a:effectLst/>
                 <a:latin typeface="Microsoft JhengHei" panose="020B0604030504040204" pitchFamily="34" charset="-120"/>
                 <a:ea typeface="Microsoft JhengHei" panose="020B0604030504040204" pitchFamily="34" charset="-120"/>
               </a:rPr>
-              <a:t> </a:t>
-            </a:r>
-            <a:r>
-              <a:rPr lang="en-US" sz="4267" b="1" dirty="0">
-                <a:solidFill>
-                  <a:srgbClr val="000066"/>
-                </a:solidFill>
-                <a:effectLst/>
-                <a:latin typeface="Microsoft JhengHei" panose="020B0604030504040204" pitchFamily="34" charset="-120"/>
-                <a:ea typeface="Microsoft JhengHei" panose="020B0604030504040204" pitchFamily="34" charset="-120"/>
-              </a:rPr>
-              <a:t>)</a:t>
+              <a:t> )</a:t>
             </a:r>
             <a:endParaRPr lang="vi-VN" sz="4267" b="1" dirty="0">
               <a:solidFill>
                 <a:srgbClr val="000066"/>
               </a:solidFill>
-              <a:effectLst/>
               <a:ea typeface="Microsoft JhengHei" panose="020B0604030504040204" pitchFamily="34" charset="-120"/>
             </a:endParaRPr>
           </a:p>
@@ -6237,50 +6147,35 @@
                 <a:solidFill>
                   <a:srgbClr val="000066"/>
                 </a:solidFill>
-                <a:effectLst/>
                 <a:latin typeface="Microsoft JhengHei" panose="020B0604030504040204" pitchFamily="34" charset="-120"/>
                 <a:ea typeface="Microsoft JhengHei" panose="020B0604030504040204" pitchFamily="34" charset="-120"/>
               </a:rPr>
               <a:t>( </a:t>
             </a:r>
             <a:r>
-              <a:rPr lang="zh-CN" altLang="en-US" sz="4267" b="1" dirty="0" smtClean="0">
+              <a:rPr lang="zh-CN" altLang="en-US" sz="4267" b="1" dirty="0">
                 <a:solidFill>
                   <a:srgbClr val="000066"/>
                 </a:solidFill>
-                <a:effectLst/>
                 <a:latin typeface="Microsoft JhengHei" panose="020B0604030504040204" pitchFamily="34" charset="-120"/>
                 <a:ea typeface="Microsoft JhengHei" panose="020B0604030504040204" pitchFamily="34" charset="-120"/>
               </a:rPr>
-              <a:t>副</a:t>
-            </a:r>
-            <a:r>
-              <a:rPr lang="en-US" sz="4267" b="1" dirty="0" smtClean="0">
+              <a:t>副歌</a:t>
+            </a:r>
+            <a:r>
+              <a:rPr lang="en-US" sz="4267" b="1" dirty="0">
                 <a:solidFill>
                   <a:srgbClr val="000066"/>
                 </a:solidFill>
-                <a:effectLst/>
                 <a:latin typeface="Microsoft JhengHei" panose="020B0604030504040204" pitchFamily="34" charset="-120"/>
                 <a:ea typeface="Microsoft JhengHei" panose="020B0604030504040204" pitchFamily="34" charset="-120"/>
               </a:rPr>
-              <a:t> </a:t>
-            </a:r>
-            <a:r>
-              <a:rPr lang="en-US" sz="4267" b="1" dirty="0">
-                <a:solidFill>
-                  <a:srgbClr val="000066"/>
-                </a:solidFill>
-                <a:effectLst/>
-                <a:latin typeface="Microsoft JhengHei" panose="020B0604030504040204" pitchFamily="34" charset="-120"/>
-                <a:ea typeface="Microsoft JhengHei" panose="020B0604030504040204" pitchFamily="34" charset="-120"/>
-              </a:rPr>
-              <a:t>)</a:t>
+              <a:t> )</a:t>
             </a:r>
             <a:endParaRPr lang="vi-VN" sz="4267" b="1" dirty="0">
               <a:solidFill>
                 <a:srgbClr val="000066"/>
               </a:solidFill>
-              <a:effectLst/>
               <a:ea typeface="Microsoft JhengHei" panose="020B0604030504040204" pitchFamily="34" charset="-120"/>
             </a:endParaRPr>
           </a:p>
@@ -6727,50 +6622,35 @@
                 <a:solidFill>
                   <a:srgbClr val="000066"/>
                 </a:solidFill>
-                <a:effectLst/>
                 <a:latin typeface="Microsoft JhengHei" panose="020B0604030504040204" pitchFamily="34" charset="-120"/>
                 <a:ea typeface="Microsoft JhengHei" panose="020B0604030504040204" pitchFamily="34" charset="-120"/>
               </a:rPr>
               <a:t>( </a:t>
             </a:r>
             <a:r>
-              <a:rPr lang="zh-CN" altLang="en-US" sz="4267" b="1" dirty="0" smtClean="0">
+              <a:rPr lang="zh-CN" altLang="en-US" sz="4267" b="1" dirty="0">
                 <a:solidFill>
                   <a:srgbClr val="000066"/>
                 </a:solidFill>
-                <a:effectLst/>
                 <a:latin typeface="Microsoft JhengHei" panose="020B0604030504040204" pitchFamily="34" charset="-120"/>
                 <a:ea typeface="Microsoft JhengHei" panose="020B0604030504040204" pitchFamily="34" charset="-120"/>
               </a:rPr>
-              <a:t>副</a:t>
-            </a:r>
-            <a:r>
-              <a:rPr lang="en-US" sz="4267" b="1" dirty="0" smtClean="0">
+              <a:t>副歌</a:t>
+            </a:r>
+            <a:r>
+              <a:rPr lang="en-US" sz="4267" b="1" dirty="0">
                 <a:solidFill>
                   <a:srgbClr val="000066"/>
                 </a:solidFill>
-                <a:effectLst/>
                 <a:latin typeface="Microsoft JhengHei" panose="020B0604030504040204" pitchFamily="34" charset="-120"/>
                 <a:ea typeface="Microsoft JhengHei" panose="020B0604030504040204" pitchFamily="34" charset="-120"/>
               </a:rPr>
-              <a:t> </a:t>
-            </a:r>
-            <a:r>
-              <a:rPr lang="en-US" sz="4267" b="1" dirty="0">
-                <a:solidFill>
-                  <a:srgbClr val="000066"/>
-                </a:solidFill>
-                <a:effectLst/>
-                <a:latin typeface="Microsoft JhengHei" panose="020B0604030504040204" pitchFamily="34" charset="-120"/>
-                <a:ea typeface="Microsoft JhengHei" panose="020B0604030504040204" pitchFamily="34" charset="-120"/>
-              </a:rPr>
-              <a:t>)</a:t>
+              <a:t> )</a:t>
             </a:r>
             <a:endParaRPr lang="vi-VN" sz="4267" b="1" dirty="0">
               <a:solidFill>
                 <a:srgbClr val="000066"/>
               </a:solidFill>
-              <a:effectLst/>
               <a:ea typeface="Microsoft JhengHei" panose="020B0604030504040204" pitchFamily="34" charset="-120"/>
             </a:endParaRPr>
           </a:p>
@@ -7261,50 +7141,35 @@
                 <a:solidFill>
                   <a:srgbClr val="000066"/>
                 </a:solidFill>
-                <a:effectLst/>
                 <a:latin typeface="Microsoft JhengHei" panose="020B0604030504040204" pitchFamily="34" charset="-120"/>
                 <a:ea typeface="Microsoft JhengHei" panose="020B0604030504040204" pitchFamily="34" charset="-120"/>
               </a:rPr>
               <a:t>( </a:t>
             </a:r>
             <a:r>
-              <a:rPr lang="zh-CN" altLang="en-US" sz="4267" b="1" dirty="0" smtClean="0">
+              <a:rPr lang="zh-CN" altLang="en-US" sz="4267" b="1" dirty="0">
                 <a:solidFill>
                   <a:srgbClr val="000066"/>
                 </a:solidFill>
-                <a:effectLst/>
                 <a:latin typeface="Microsoft JhengHei" panose="020B0604030504040204" pitchFamily="34" charset="-120"/>
                 <a:ea typeface="Microsoft JhengHei" panose="020B0604030504040204" pitchFamily="34" charset="-120"/>
               </a:rPr>
-              <a:t>副</a:t>
-            </a:r>
-            <a:r>
-              <a:rPr lang="en-US" sz="4267" b="1" dirty="0" smtClean="0">
+              <a:t>副歌</a:t>
+            </a:r>
+            <a:r>
+              <a:rPr lang="en-US" sz="4267" b="1" dirty="0">
                 <a:solidFill>
                   <a:srgbClr val="000066"/>
                 </a:solidFill>
-                <a:effectLst/>
                 <a:latin typeface="Microsoft JhengHei" panose="020B0604030504040204" pitchFamily="34" charset="-120"/>
                 <a:ea typeface="Microsoft JhengHei" panose="020B0604030504040204" pitchFamily="34" charset="-120"/>
               </a:rPr>
-              <a:t> </a:t>
-            </a:r>
-            <a:r>
-              <a:rPr lang="en-US" sz="4267" b="1" dirty="0">
-                <a:solidFill>
-                  <a:srgbClr val="000066"/>
-                </a:solidFill>
-                <a:effectLst/>
-                <a:latin typeface="Microsoft JhengHei" panose="020B0604030504040204" pitchFamily="34" charset="-120"/>
-                <a:ea typeface="Microsoft JhengHei" panose="020B0604030504040204" pitchFamily="34" charset="-120"/>
-              </a:rPr>
-              <a:t>)</a:t>
+              <a:t> )</a:t>
             </a:r>
             <a:endParaRPr lang="vi-VN" sz="4267" b="1" dirty="0">
               <a:solidFill>
                 <a:srgbClr val="000066"/>
               </a:solidFill>
-              <a:effectLst/>
               <a:ea typeface="Microsoft JhengHei" panose="020B0604030504040204" pitchFamily="34" charset="-120"/>
             </a:endParaRPr>
           </a:p>
@@ -7366,34 +7231,14 @@
               <a:buNone/>
             </a:pPr>
             <a:r>
-              <a:rPr lang="zh-TW" altLang="en-US" sz="6400" b="1" dirty="0" smtClean="0">
+              <a:rPr lang="zh-TW" altLang="en-US" sz="6400" b="1" dirty="0">
                 <a:solidFill>
                   <a:srgbClr val="000066"/>
                 </a:solidFill>
                 <a:latin typeface="微軟正黑體" pitchFamily="34" charset="-120"/>
                 <a:ea typeface="微軟正黑體" pitchFamily="34" charset="-120"/>
               </a:rPr>
-              <a:t>人</a:t>
-            </a:r>
-            <a:r>
-              <a:rPr lang="zh-TW" altLang="en-US" sz="6400" b="1" dirty="0">
-                <a:solidFill>
-                  <a:srgbClr val="000066"/>
-                </a:solidFill>
-                <a:latin typeface="微軟正黑體" pitchFamily="34" charset="-120"/>
-                <a:ea typeface="微軟正黑體" pitchFamily="34" charset="-120"/>
-              </a:rPr>
-              <a:t>生一切能享的</a:t>
-            </a:r>
-            <a:r>
-              <a:rPr lang="zh-TW" altLang="en-US" sz="6400" b="1" dirty="0" smtClean="0">
-                <a:solidFill>
-                  <a:srgbClr val="000066"/>
-                </a:solidFill>
-                <a:latin typeface="微軟正黑體" pitchFamily="34" charset="-120"/>
-                <a:ea typeface="微軟正黑體" pitchFamily="34" charset="-120"/>
-              </a:rPr>
-              <a:t>福</a:t>
+              <a:t>人生一切能享的福</a:t>
             </a:r>
             <a:endParaRPr lang="en-US" altLang="zh-CN" sz="6400" b="1" dirty="0">
               <a:solidFill>
@@ -7568,7 +7413,7 @@
               <a:buNone/>
             </a:pPr>
             <a:r>
-              <a:rPr lang="en-US" sz="4000" b="1" dirty="0" err="1" smtClean="0">
+              <a:rPr lang="en-US" sz="4000" b="1" dirty="0" err="1">
                 <a:solidFill>
                   <a:srgbClr val="660033"/>
                 </a:solidFill>
@@ -7579,7 +7424,7 @@
               <a:t>Mọi</a:t>
             </a:r>
             <a:r>
-              <a:rPr lang="en-US" sz="4000" b="1" dirty="0" smtClean="0">
+              <a:rPr lang="en-US" sz="4000" b="1" dirty="0">
                 <a:solidFill>
                   <a:srgbClr val="660033"/>
                 </a:solidFill>
@@ -7778,7 +7623,7 @@
               <a:t>( </a:t>
             </a:r>
             <a:r>
-              <a:rPr lang="zh-CN" altLang="en-US" sz="4267" b="1" dirty="0" smtClean="0">
+              <a:rPr lang="zh-CN" altLang="en-US" sz="4267" b="1" dirty="0">
                 <a:solidFill>
                   <a:srgbClr val="000066"/>
                 </a:solidFill>
@@ -7789,7 +7634,17 @@
               <a:t>正</a:t>
             </a:r>
             <a:r>
-              <a:rPr lang="en-US" sz="4267" b="1" dirty="0" smtClean="0">
+              <a:rPr lang="zh-CN" altLang="en-US" sz="4267" b="1" dirty="0">
+                <a:solidFill>
+                  <a:srgbClr val="000066"/>
+                </a:solidFill>
+                <a:latin typeface="Microsoft JhengHei" panose="020B0604030504040204" pitchFamily="34" charset="-120"/>
+                <a:ea typeface="Microsoft JhengHei" panose="020B0604030504040204" pitchFamily="34" charset="-120"/>
+              </a:rPr>
+              <a:t>歌</a:t>
+            </a:r>
+            <a:r>
+              <a:rPr lang="en-US" sz="4267" b="1" dirty="0">
                 <a:solidFill>
                   <a:srgbClr val="000066"/>
                 </a:solidFill>
@@ -7797,18 +7652,7 @@
                 <a:latin typeface="Microsoft JhengHei" panose="020B0604030504040204" pitchFamily="34" charset="-120"/>
                 <a:ea typeface="Microsoft JhengHei" panose="020B0604030504040204" pitchFamily="34" charset="-120"/>
               </a:rPr>
-              <a:t> </a:t>
-            </a:r>
-            <a:r>
-              <a:rPr lang="en-US" sz="4267" b="1" dirty="0">
-                <a:solidFill>
-                  <a:srgbClr val="000066"/>
-                </a:solidFill>
-                <a:effectLst/>
-                <a:latin typeface="Microsoft JhengHei" panose="020B0604030504040204" pitchFamily="34" charset="-120"/>
-                <a:ea typeface="Microsoft JhengHei" panose="020B0604030504040204" pitchFamily="34" charset="-120"/>
-              </a:rPr>
-              <a:t>)</a:t>
+              <a:t> )</a:t>
             </a:r>
             <a:endParaRPr lang="vi-VN" sz="4267" b="1" dirty="0">
               <a:solidFill>
@@ -7876,24 +7720,14 @@
               <a:buNone/>
             </a:pPr>
             <a:r>
-              <a:rPr lang="zh-TW" altLang="en-US" sz="6400" b="1" dirty="0" smtClean="0">
+              <a:rPr lang="zh-TW" altLang="en-US" sz="6400" b="1" dirty="0">
                 <a:solidFill>
                   <a:srgbClr val="000066"/>
                 </a:solidFill>
                 <a:latin typeface="微軟正黑體" pitchFamily="34" charset="-120"/>
                 <a:ea typeface="微軟正黑體" pitchFamily="34" charset="-120"/>
               </a:rPr>
-              <a:t>哪</a:t>
-            </a:r>
-            <a:r>
-              <a:rPr lang="zh-TW" altLang="en-US" sz="6400" b="1" dirty="0">
-                <a:solidFill>
-                  <a:srgbClr val="000066"/>
-                </a:solidFill>
-                <a:latin typeface="微軟正黑體" pitchFamily="34" charset="-120"/>
-                <a:ea typeface="微軟正黑體" pitchFamily="34" charset="-120"/>
-              </a:rPr>
-              <a:t>樣保留的住</a:t>
+              <a:t>哪樣保留的住</a:t>
             </a:r>
             <a:endParaRPr lang="en-US" altLang="zh-CN" sz="6400" b="1" dirty="0">
               <a:solidFill>
@@ -8230,50 +8064,35 @@
                 <a:solidFill>
                   <a:srgbClr val="000066"/>
                 </a:solidFill>
-                <a:effectLst/>
                 <a:latin typeface="Microsoft JhengHei" panose="020B0604030504040204" pitchFamily="34" charset="-120"/>
                 <a:ea typeface="Microsoft JhengHei" panose="020B0604030504040204" pitchFamily="34" charset="-120"/>
               </a:rPr>
               <a:t>( </a:t>
             </a:r>
             <a:r>
-              <a:rPr lang="zh-CN" altLang="en-US" sz="4267" b="1" dirty="0" smtClean="0">
+              <a:rPr lang="zh-CN" altLang="en-US" sz="4267" b="1" dirty="0">
                 <a:solidFill>
                   <a:srgbClr val="000066"/>
                 </a:solidFill>
-                <a:effectLst/>
                 <a:latin typeface="Microsoft JhengHei" panose="020B0604030504040204" pitchFamily="34" charset="-120"/>
                 <a:ea typeface="Microsoft JhengHei" panose="020B0604030504040204" pitchFamily="34" charset="-120"/>
               </a:rPr>
-              <a:t>正</a:t>
-            </a:r>
-            <a:r>
-              <a:rPr lang="en-US" sz="4267" b="1" dirty="0" smtClean="0">
+              <a:t>正歌</a:t>
+            </a:r>
+            <a:r>
+              <a:rPr lang="en-US" sz="4267" b="1" dirty="0">
                 <a:solidFill>
                   <a:srgbClr val="000066"/>
                 </a:solidFill>
-                <a:effectLst/>
                 <a:latin typeface="Microsoft JhengHei" panose="020B0604030504040204" pitchFamily="34" charset="-120"/>
                 <a:ea typeface="Microsoft JhengHei" panose="020B0604030504040204" pitchFamily="34" charset="-120"/>
               </a:rPr>
-              <a:t> </a:t>
-            </a:r>
-            <a:r>
-              <a:rPr lang="en-US" sz="4267" b="1" dirty="0">
-                <a:solidFill>
-                  <a:srgbClr val="000066"/>
-                </a:solidFill>
-                <a:effectLst/>
-                <a:latin typeface="Microsoft JhengHei" panose="020B0604030504040204" pitchFamily="34" charset="-120"/>
-                <a:ea typeface="Microsoft JhengHei" panose="020B0604030504040204" pitchFamily="34" charset="-120"/>
-              </a:rPr>
-              <a:t>)</a:t>
+              <a:t> )</a:t>
             </a:r>
             <a:endParaRPr lang="vi-VN" sz="4267" b="1" dirty="0">
               <a:solidFill>
                 <a:srgbClr val="000066"/>
               </a:solidFill>
-              <a:effectLst/>
               <a:ea typeface="Microsoft JhengHei" panose="020B0604030504040204" pitchFamily="34" charset="-120"/>
             </a:endParaRPr>
           </a:p>
@@ -8335,34 +8154,14 @@
               <a:buNone/>
             </a:pPr>
             <a:r>
-              <a:rPr lang="zh-TW" altLang="en-US" sz="6400" b="1" dirty="0" smtClean="0">
+              <a:rPr lang="zh-TW" altLang="en-US" sz="6400" b="1" dirty="0">
                 <a:solidFill>
                   <a:srgbClr val="000066"/>
                 </a:solidFill>
                 <a:latin typeface="微軟正黑體" pitchFamily="34" charset="-120"/>
                 <a:ea typeface="微軟正黑體" pitchFamily="34" charset="-120"/>
               </a:rPr>
-              <a:t>人</a:t>
-            </a:r>
-            <a:r>
-              <a:rPr lang="zh-TW" altLang="en-US" sz="6400" b="1" dirty="0">
-                <a:solidFill>
-                  <a:srgbClr val="000066"/>
-                </a:solidFill>
-                <a:latin typeface="微軟正黑體" pitchFamily="34" charset="-120"/>
-                <a:ea typeface="微軟正黑體" pitchFamily="34" charset="-120"/>
-              </a:rPr>
-              <a:t>生一切能享的</a:t>
-            </a:r>
-            <a:r>
-              <a:rPr lang="zh-TW" altLang="en-US" sz="6400" b="1" dirty="0" smtClean="0">
-                <a:solidFill>
-                  <a:srgbClr val="000066"/>
-                </a:solidFill>
-                <a:latin typeface="微軟正黑體" pitchFamily="34" charset="-120"/>
-                <a:ea typeface="微軟正黑體" pitchFamily="34" charset="-120"/>
-              </a:rPr>
-              <a:t>福</a:t>
+              <a:t>人生一切能享的福</a:t>
             </a:r>
             <a:endParaRPr lang="en-US" altLang="zh-CN" sz="6400" b="1" dirty="0">
               <a:solidFill>
@@ -8537,7 +8336,7 @@
               <a:buNone/>
             </a:pPr>
             <a:r>
-              <a:rPr lang="en-US" sz="4000" b="1" dirty="0" err="1" smtClean="0">
+              <a:rPr lang="en-US" sz="4000" b="1" dirty="0" err="1">
                 <a:solidFill>
                   <a:srgbClr val="660033"/>
                 </a:solidFill>
@@ -8548,7 +8347,7 @@
               <a:t>Mọi</a:t>
             </a:r>
             <a:r>
-              <a:rPr lang="en-US" sz="4000" b="1" dirty="0" smtClean="0">
+              <a:rPr lang="en-US" sz="4000" b="1" dirty="0">
                 <a:solidFill>
                   <a:srgbClr val="660033"/>
                 </a:solidFill>
@@ -8740,50 +8539,35 @@
                 <a:solidFill>
                   <a:srgbClr val="000066"/>
                 </a:solidFill>
-                <a:effectLst/>
                 <a:latin typeface="Microsoft JhengHei" panose="020B0604030504040204" pitchFamily="34" charset="-120"/>
                 <a:ea typeface="Microsoft JhengHei" panose="020B0604030504040204" pitchFamily="34" charset="-120"/>
               </a:rPr>
               <a:t>( </a:t>
             </a:r>
             <a:r>
-              <a:rPr lang="zh-CN" altLang="en-US" sz="4267" b="1" dirty="0" smtClean="0">
+              <a:rPr lang="zh-CN" altLang="en-US" sz="4267" b="1" dirty="0">
                 <a:solidFill>
                   <a:srgbClr val="000066"/>
                 </a:solidFill>
-                <a:effectLst/>
                 <a:latin typeface="Microsoft JhengHei" panose="020B0604030504040204" pitchFamily="34" charset="-120"/>
                 <a:ea typeface="Microsoft JhengHei" panose="020B0604030504040204" pitchFamily="34" charset="-120"/>
               </a:rPr>
-              <a:t>正</a:t>
-            </a:r>
-            <a:r>
-              <a:rPr lang="en-US" sz="4267" b="1" dirty="0" smtClean="0">
+              <a:t>正歌</a:t>
+            </a:r>
+            <a:r>
+              <a:rPr lang="en-US" sz="4267" b="1" dirty="0">
                 <a:solidFill>
                   <a:srgbClr val="000066"/>
                 </a:solidFill>
-                <a:effectLst/>
                 <a:latin typeface="Microsoft JhengHei" panose="020B0604030504040204" pitchFamily="34" charset="-120"/>
                 <a:ea typeface="Microsoft JhengHei" panose="020B0604030504040204" pitchFamily="34" charset="-120"/>
               </a:rPr>
-              <a:t> </a:t>
-            </a:r>
-            <a:r>
-              <a:rPr lang="en-US" sz="4267" b="1" dirty="0">
-                <a:solidFill>
-                  <a:srgbClr val="000066"/>
-                </a:solidFill>
-                <a:effectLst/>
-                <a:latin typeface="Microsoft JhengHei" panose="020B0604030504040204" pitchFamily="34" charset="-120"/>
-                <a:ea typeface="Microsoft JhengHei" panose="020B0604030504040204" pitchFamily="34" charset="-120"/>
-              </a:rPr>
-              <a:t>)</a:t>
+              <a:t> )</a:t>
             </a:r>
             <a:endParaRPr lang="vi-VN" sz="4267" b="1" dirty="0">
               <a:solidFill>
                 <a:srgbClr val="000066"/>
               </a:solidFill>
-              <a:effectLst/>
               <a:ea typeface="Microsoft JhengHei" panose="020B0604030504040204" pitchFamily="34" charset="-120"/>
             </a:endParaRPr>
           </a:p>
@@ -9211,50 +8995,35 @@
                 <a:solidFill>
                   <a:srgbClr val="000066"/>
                 </a:solidFill>
-                <a:effectLst/>
                 <a:latin typeface="Microsoft JhengHei" panose="020B0604030504040204" pitchFamily="34" charset="-120"/>
                 <a:ea typeface="Microsoft JhengHei" panose="020B0604030504040204" pitchFamily="34" charset="-120"/>
               </a:rPr>
               <a:t>( </a:t>
             </a:r>
             <a:r>
-              <a:rPr lang="zh-CN" altLang="en-US" sz="4267" b="1" dirty="0" smtClean="0">
+              <a:rPr lang="zh-CN" altLang="en-US" sz="4267" b="1" dirty="0">
                 <a:solidFill>
                   <a:srgbClr val="000066"/>
                 </a:solidFill>
-                <a:effectLst/>
                 <a:latin typeface="Microsoft JhengHei" panose="020B0604030504040204" pitchFamily="34" charset="-120"/>
                 <a:ea typeface="Microsoft JhengHei" panose="020B0604030504040204" pitchFamily="34" charset="-120"/>
               </a:rPr>
-              <a:t>正</a:t>
-            </a:r>
-            <a:r>
-              <a:rPr lang="en-US" sz="4267" b="1" dirty="0" smtClean="0">
+              <a:t>正歌</a:t>
+            </a:r>
+            <a:r>
+              <a:rPr lang="en-US" sz="4267" b="1" dirty="0">
                 <a:solidFill>
                   <a:srgbClr val="000066"/>
                 </a:solidFill>
-                <a:effectLst/>
                 <a:latin typeface="Microsoft JhengHei" panose="020B0604030504040204" pitchFamily="34" charset="-120"/>
                 <a:ea typeface="Microsoft JhengHei" panose="020B0604030504040204" pitchFamily="34" charset="-120"/>
               </a:rPr>
-              <a:t> </a:t>
-            </a:r>
-            <a:r>
-              <a:rPr lang="en-US" sz="4267" b="1" dirty="0">
-                <a:solidFill>
-                  <a:srgbClr val="000066"/>
-                </a:solidFill>
-                <a:effectLst/>
-                <a:latin typeface="Microsoft JhengHei" panose="020B0604030504040204" pitchFamily="34" charset="-120"/>
-                <a:ea typeface="Microsoft JhengHei" panose="020B0604030504040204" pitchFamily="34" charset="-120"/>
-              </a:rPr>
-              <a:t>)</a:t>
+              <a:t> )</a:t>
             </a:r>
             <a:endParaRPr lang="vi-VN" sz="4267" b="1" dirty="0">
               <a:solidFill>
                 <a:srgbClr val="000066"/>
               </a:solidFill>
-              <a:effectLst/>
               <a:ea typeface="Microsoft JhengHei" panose="020B0604030504040204" pitchFamily="34" charset="-120"/>
             </a:endParaRPr>
           </a:p>
@@ -9316,34 +9085,14 @@
               <a:buNone/>
             </a:pPr>
             <a:r>
-              <a:rPr lang="zh-TW" altLang="en-US" sz="6400" b="1" dirty="0" smtClean="0">
+              <a:rPr lang="zh-TW" altLang="en-US" sz="6400" b="1" dirty="0">
                 <a:solidFill>
                   <a:srgbClr val="000066"/>
                 </a:solidFill>
                 <a:latin typeface="微軟正黑體" pitchFamily="34" charset="-120"/>
                 <a:ea typeface="微軟正黑體" pitchFamily="34" charset="-120"/>
               </a:rPr>
-              <a:t>人</a:t>
-            </a:r>
-            <a:r>
-              <a:rPr lang="zh-TW" altLang="en-US" sz="6400" b="1" dirty="0">
-                <a:solidFill>
-                  <a:srgbClr val="000066"/>
-                </a:solidFill>
-                <a:latin typeface="微軟正黑體" pitchFamily="34" charset="-120"/>
-                <a:ea typeface="微軟正黑體" pitchFamily="34" charset="-120"/>
-              </a:rPr>
-              <a:t>生一切能享的</a:t>
-            </a:r>
-            <a:r>
-              <a:rPr lang="zh-TW" altLang="en-US" sz="6400" b="1" dirty="0" smtClean="0">
-                <a:solidFill>
-                  <a:srgbClr val="000066"/>
-                </a:solidFill>
-                <a:latin typeface="微軟正黑體" pitchFamily="34" charset="-120"/>
-                <a:ea typeface="微軟正黑體" pitchFamily="34" charset="-120"/>
-              </a:rPr>
-              <a:t>福</a:t>
+              <a:t>人生一切能享的福</a:t>
             </a:r>
             <a:endParaRPr lang="en-US" altLang="zh-CN" sz="6400" b="1" dirty="0">
               <a:solidFill>
@@ -9518,7 +9267,7 @@
               <a:buNone/>
             </a:pPr>
             <a:r>
-              <a:rPr lang="en-US" sz="4000" b="1" dirty="0" err="1" smtClean="0">
+              <a:rPr lang="en-US" sz="4000" b="1" dirty="0" err="1">
                 <a:solidFill>
                   <a:srgbClr val="660033"/>
                 </a:solidFill>
@@ -9529,7 +9278,7 @@
               <a:t>Mọi</a:t>
             </a:r>
             <a:r>
-              <a:rPr lang="en-US" sz="4000" b="1" dirty="0" smtClean="0">
+              <a:rPr lang="en-US" sz="4000" b="1" dirty="0">
                 <a:solidFill>
                   <a:srgbClr val="660033"/>
                 </a:solidFill>
@@ -9721,50 +9470,35 @@
                 <a:solidFill>
                   <a:srgbClr val="000066"/>
                 </a:solidFill>
-                <a:effectLst/>
                 <a:latin typeface="Microsoft JhengHei" panose="020B0604030504040204" pitchFamily="34" charset="-120"/>
                 <a:ea typeface="Microsoft JhengHei" panose="020B0604030504040204" pitchFamily="34" charset="-120"/>
               </a:rPr>
               <a:t>( </a:t>
             </a:r>
             <a:r>
-              <a:rPr lang="zh-CN" altLang="en-US" sz="4267" b="1" dirty="0" smtClean="0">
+              <a:rPr lang="zh-CN" altLang="en-US" sz="4267" b="1" dirty="0">
                 <a:solidFill>
                   <a:srgbClr val="000066"/>
                 </a:solidFill>
-                <a:effectLst/>
                 <a:latin typeface="Microsoft JhengHei" panose="020B0604030504040204" pitchFamily="34" charset="-120"/>
                 <a:ea typeface="Microsoft JhengHei" panose="020B0604030504040204" pitchFamily="34" charset="-120"/>
               </a:rPr>
-              <a:t>正</a:t>
-            </a:r>
-            <a:r>
-              <a:rPr lang="en-US" sz="4267" b="1" dirty="0" smtClean="0">
+              <a:t>正歌</a:t>
+            </a:r>
+            <a:r>
+              <a:rPr lang="en-US" sz="4267" b="1" dirty="0">
                 <a:solidFill>
                   <a:srgbClr val="000066"/>
                 </a:solidFill>
-                <a:effectLst/>
                 <a:latin typeface="Microsoft JhengHei" panose="020B0604030504040204" pitchFamily="34" charset="-120"/>
                 <a:ea typeface="Microsoft JhengHei" panose="020B0604030504040204" pitchFamily="34" charset="-120"/>
               </a:rPr>
-              <a:t> </a:t>
-            </a:r>
-            <a:r>
-              <a:rPr lang="en-US" sz="4267" b="1" dirty="0">
-                <a:solidFill>
-                  <a:srgbClr val="000066"/>
-                </a:solidFill>
-                <a:effectLst/>
-                <a:latin typeface="Microsoft JhengHei" panose="020B0604030504040204" pitchFamily="34" charset="-120"/>
-                <a:ea typeface="Microsoft JhengHei" panose="020B0604030504040204" pitchFamily="34" charset="-120"/>
-              </a:rPr>
-              <a:t>)</a:t>
+              <a:t> )</a:t>
             </a:r>
             <a:endParaRPr lang="vi-VN" sz="4267" b="1" dirty="0">
               <a:solidFill>
                 <a:srgbClr val="000066"/>
               </a:solidFill>
-              <a:effectLst/>
               <a:ea typeface="Microsoft JhengHei" panose="020B0604030504040204" pitchFamily="34" charset="-120"/>
             </a:endParaRPr>
           </a:p>
@@ -10170,50 +9904,35 @@
                 <a:solidFill>
                   <a:srgbClr val="000066"/>
                 </a:solidFill>
-                <a:effectLst/>
                 <a:latin typeface="Microsoft JhengHei" panose="020B0604030504040204" pitchFamily="34" charset="-120"/>
                 <a:ea typeface="Microsoft JhengHei" panose="020B0604030504040204" pitchFamily="34" charset="-120"/>
               </a:rPr>
               <a:t>( </a:t>
             </a:r>
             <a:r>
-              <a:rPr lang="zh-CN" altLang="en-US" sz="4267" b="1" dirty="0" smtClean="0">
+              <a:rPr lang="zh-CN" altLang="en-US" sz="4267" b="1" dirty="0">
                 <a:solidFill>
                   <a:srgbClr val="000066"/>
                 </a:solidFill>
-                <a:effectLst/>
                 <a:latin typeface="Microsoft JhengHei" panose="020B0604030504040204" pitchFamily="34" charset="-120"/>
                 <a:ea typeface="Microsoft JhengHei" panose="020B0604030504040204" pitchFamily="34" charset="-120"/>
               </a:rPr>
-              <a:t>正</a:t>
-            </a:r>
-            <a:r>
-              <a:rPr lang="en-US" sz="4267" b="1" dirty="0" smtClean="0">
+              <a:t>正歌</a:t>
+            </a:r>
+            <a:r>
+              <a:rPr lang="en-US" sz="4267" b="1" dirty="0">
                 <a:solidFill>
                   <a:srgbClr val="000066"/>
                 </a:solidFill>
-                <a:effectLst/>
                 <a:latin typeface="Microsoft JhengHei" panose="020B0604030504040204" pitchFamily="34" charset="-120"/>
                 <a:ea typeface="Microsoft JhengHei" panose="020B0604030504040204" pitchFamily="34" charset="-120"/>
               </a:rPr>
-              <a:t> </a:t>
-            </a:r>
-            <a:r>
-              <a:rPr lang="en-US" sz="4267" b="1" dirty="0">
-                <a:solidFill>
-                  <a:srgbClr val="000066"/>
-                </a:solidFill>
-                <a:effectLst/>
-                <a:latin typeface="Microsoft JhengHei" panose="020B0604030504040204" pitchFamily="34" charset="-120"/>
-                <a:ea typeface="Microsoft JhengHei" panose="020B0604030504040204" pitchFamily="34" charset="-120"/>
-              </a:rPr>
-              <a:t>)</a:t>
+              <a:t> )</a:t>
             </a:r>
             <a:endParaRPr lang="vi-VN" sz="4267" b="1" dirty="0">
               <a:solidFill>
                 <a:srgbClr val="000066"/>
               </a:solidFill>
-              <a:effectLst/>
               <a:ea typeface="Microsoft JhengHei" panose="020B0604030504040204" pitchFamily="34" charset="-120"/>
             </a:endParaRPr>
           </a:p>
@@ -10275,34 +9994,14 @@
               <a:buNone/>
             </a:pPr>
             <a:r>
-              <a:rPr lang="zh-TW" altLang="en-US" sz="6400" b="1" dirty="0" smtClean="0">
+              <a:rPr lang="zh-TW" altLang="en-US" sz="6400" b="1" dirty="0">
                 <a:solidFill>
                   <a:srgbClr val="000066"/>
                 </a:solidFill>
                 <a:latin typeface="微軟正黑體" pitchFamily="34" charset="-120"/>
                 <a:ea typeface="微軟正黑體" pitchFamily="34" charset="-120"/>
               </a:rPr>
-              <a:t>人</a:t>
-            </a:r>
-            <a:r>
-              <a:rPr lang="zh-TW" altLang="en-US" sz="6400" b="1" dirty="0">
-                <a:solidFill>
-                  <a:srgbClr val="000066"/>
-                </a:solidFill>
-                <a:latin typeface="微軟正黑體" pitchFamily="34" charset="-120"/>
-                <a:ea typeface="微軟正黑體" pitchFamily="34" charset="-120"/>
-              </a:rPr>
-              <a:t>生一切能享的</a:t>
-            </a:r>
-            <a:r>
-              <a:rPr lang="zh-TW" altLang="en-US" sz="6400" b="1" dirty="0" smtClean="0">
-                <a:solidFill>
-                  <a:srgbClr val="000066"/>
-                </a:solidFill>
-                <a:latin typeface="微軟正黑體" pitchFamily="34" charset="-120"/>
-                <a:ea typeface="微軟正黑體" pitchFamily="34" charset="-120"/>
-              </a:rPr>
-              <a:t>福</a:t>
+              <a:t>人生一切能享的福</a:t>
             </a:r>
             <a:endParaRPr lang="en-US" altLang="zh-CN" sz="6400" b="1" dirty="0">
               <a:solidFill>
@@ -10477,7 +10176,7 @@
               <a:buNone/>
             </a:pPr>
             <a:r>
-              <a:rPr lang="en-US" sz="4000" b="1" dirty="0" err="1" smtClean="0">
+              <a:rPr lang="en-US" sz="4000" b="1" dirty="0" err="1">
                 <a:solidFill>
                   <a:srgbClr val="660033"/>
                 </a:solidFill>
@@ -10488,7 +10187,7 @@
               <a:t>Mọi</a:t>
             </a:r>
             <a:r>
-              <a:rPr lang="en-US" sz="4000" b="1" dirty="0" smtClean="0">
+              <a:rPr lang="en-US" sz="4000" b="1" dirty="0">
                 <a:solidFill>
                   <a:srgbClr val="660033"/>
                 </a:solidFill>
@@ -10680,50 +10379,35 @@
                 <a:solidFill>
                   <a:srgbClr val="000066"/>
                 </a:solidFill>
-                <a:effectLst/>
                 <a:latin typeface="Microsoft JhengHei" panose="020B0604030504040204" pitchFamily="34" charset="-120"/>
                 <a:ea typeface="Microsoft JhengHei" panose="020B0604030504040204" pitchFamily="34" charset="-120"/>
               </a:rPr>
               <a:t>( </a:t>
             </a:r>
             <a:r>
-              <a:rPr lang="zh-CN" altLang="en-US" sz="4267" b="1" dirty="0" smtClean="0">
+              <a:rPr lang="zh-CN" altLang="en-US" sz="4267" b="1" dirty="0">
                 <a:solidFill>
                   <a:srgbClr val="000066"/>
                 </a:solidFill>
-                <a:effectLst/>
                 <a:latin typeface="Microsoft JhengHei" panose="020B0604030504040204" pitchFamily="34" charset="-120"/>
                 <a:ea typeface="Microsoft JhengHei" panose="020B0604030504040204" pitchFamily="34" charset="-120"/>
               </a:rPr>
-              <a:t>正</a:t>
-            </a:r>
-            <a:r>
-              <a:rPr lang="en-US" sz="4267" b="1" dirty="0" smtClean="0">
+              <a:t>正歌</a:t>
+            </a:r>
+            <a:r>
+              <a:rPr lang="en-US" sz="4267" b="1" dirty="0">
                 <a:solidFill>
                   <a:srgbClr val="000066"/>
                 </a:solidFill>
-                <a:effectLst/>
                 <a:latin typeface="Microsoft JhengHei" panose="020B0604030504040204" pitchFamily="34" charset="-120"/>
                 <a:ea typeface="Microsoft JhengHei" panose="020B0604030504040204" pitchFamily="34" charset="-120"/>
               </a:rPr>
-              <a:t> </a:t>
-            </a:r>
-            <a:r>
-              <a:rPr lang="en-US" sz="4267" b="1" dirty="0">
-                <a:solidFill>
-                  <a:srgbClr val="000066"/>
-                </a:solidFill>
-                <a:effectLst/>
-                <a:latin typeface="Microsoft JhengHei" panose="020B0604030504040204" pitchFamily="34" charset="-120"/>
-                <a:ea typeface="Microsoft JhengHei" panose="020B0604030504040204" pitchFamily="34" charset="-120"/>
-              </a:rPr>
-              <a:t>)</a:t>
+              <a:t> )</a:t>
             </a:r>
             <a:endParaRPr lang="vi-VN" sz="4267" b="1" dirty="0">
               <a:solidFill>
                 <a:srgbClr val="000066"/>
               </a:solidFill>
-              <a:effectLst/>
               <a:ea typeface="Microsoft JhengHei" panose="020B0604030504040204" pitchFamily="34" charset="-120"/>
             </a:endParaRPr>
           </a:p>
@@ -11107,50 +10791,35 @@
                 <a:solidFill>
                   <a:srgbClr val="000066"/>
                 </a:solidFill>
-                <a:effectLst/>
                 <a:latin typeface="Microsoft JhengHei" panose="020B0604030504040204" pitchFamily="34" charset="-120"/>
                 <a:ea typeface="Microsoft JhengHei" panose="020B0604030504040204" pitchFamily="34" charset="-120"/>
               </a:rPr>
               <a:t>( </a:t>
             </a:r>
             <a:r>
-              <a:rPr lang="zh-CN" altLang="en-US" sz="4267" b="1" dirty="0" smtClean="0">
+              <a:rPr lang="zh-CN" altLang="en-US" sz="4267" b="1" dirty="0">
                 <a:solidFill>
                   <a:srgbClr val="000066"/>
                 </a:solidFill>
-                <a:effectLst/>
                 <a:latin typeface="Microsoft JhengHei" panose="020B0604030504040204" pitchFamily="34" charset="-120"/>
                 <a:ea typeface="Microsoft JhengHei" panose="020B0604030504040204" pitchFamily="34" charset="-120"/>
               </a:rPr>
-              <a:t>正</a:t>
-            </a:r>
-            <a:r>
-              <a:rPr lang="en-US" sz="4267" b="1" dirty="0" smtClean="0">
+              <a:t>正歌</a:t>
+            </a:r>
+            <a:r>
+              <a:rPr lang="en-US" sz="4267" b="1" dirty="0">
                 <a:solidFill>
                   <a:srgbClr val="000066"/>
                 </a:solidFill>
-                <a:effectLst/>
                 <a:latin typeface="Microsoft JhengHei" panose="020B0604030504040204" pitchFamily="34" charset="-120"/>
                 <a:ea typeface="Microsoft JhengHei" panose="020B0604030504040204" pitchFamily="34" charset="-120"/>
               </a:rPr>
-              <a:t> </a:t>
-            </a:r>
-            <a:r>
-              <a:rPr lang="en-US" sz="4267" b="1" dirty="0">
-                <a:solidFill>
-                  <a:srgbClr val="000066"/>
-                </a:solidFill>
-                <a:effectLst/>
-                <a:latin typeface="Microsoft JhengHei" panose="020B0604030504040204" pitchFamily="34" charset="-120"/>
-                <a:ea typeface="Microsoft JhengHei" panose="020B0604030504040204" pitchFamily="34" charset="-120"/>
-              </a:rPr>
-              <a:t>)</a:t>
+              <a:t> )</a:t>
             </a:r>
             <a:endParaRPr lang="vi-VN" sz="4267" b="1" dirty="0">
               <a:solidFill>
                 <a:srgbClr val="000066"/>
               </a:solidFill>
-              <a:effectLst/>
               <a:ea typeface="Microsoft JhengHei" panose="020B0604030504040204" pitchFamily="34" charset="-120"/>
             </a:endParaRPr>
           </a:p>
